--- a/prezentacie/c06w.pptx
+++ b/prezentacie/c06w.pptx
@@ -249,7 +249,7 @@
           <a:p>
             <a:fld id="{10052495-8BC8-4CFB-94B1-B0429F101A0D}" type="datetimeFigureOut">
               <a:rPr lang="sk-SK" smtClean="0"/>
-              <a:t>20. 10. 2025</a:t>
+              <a:t>25. 10. 2026</a:t>
             </a:fld>
             <a:endParaRPr lang="sk-SK"/>
           </a:p>
@@ -419,7 +419,7 @@
           <a:p>
             <a:fld id="{10052495-8BC8-4CFB-94B1-B0429F101A0D}" type="datetimeFigureOut">
               <a:rPr lang="sk-SK" smtClean="0"/>
-              <a:t>20. 10. 2025</a:t>
+              <a:t>25. 10. 2026</a:t>
             </a:fld>
             <a:endParaRPr lang="sk-SK"/>
           </a:p>
@@ -599,7 +599,7 @@
           <a:p>
             <a:fld id="{10052495-8BC8-4CFB-94B1-B0429F101A0D}" type="datetimeFigureOut">
               <a:rPr lang="sk-SK" smtClean="0"/>
-              <a:t>20. 10. 2025</a:t>
+              <a:t>25. 10. 2026</a:t>
             </a:fld>
             <a:endParaRPr lang="sk-SK"/>
           </a:p>
@@ -769,7 +769,7 @@
           <a:p>
             <a:fld id="{10052495-8BC8-4CFB-94B1-B0429F101A0D}" type="datetimeFigureOut">
               <a:rPr lang="sk-SK" smtClean="0"/>
-              <a:t>20. 10. 2025</a:t>
+              <a:t>25. 10. 2026</a:t>
             </a:fld>
             <a:endParaRPr lang="sk-SK"/>
           </a:p>
@@ -1015,7 +1015,7 @@
           <a:p>
             <a:fld id="{10052495-8BC8-4CFB-94B1-B0429F101A0D}" type="datetimeFigureOut">
               <a:rPr lang="sk-SK" smtClean="0"/>
-              <a:t>20. 10. 2025</a:t>
+              <a:t>25. 10. 2026</a:t>
             </a:fld>
             <a:endParaRPr lang="sk-SK"/>
           </a:p>
@@ -1247,7 +1247,7 @@
           <a:p>
             <a:fld id="{10052495-8BC8-4CFB-94B1-B0429F101A0D}" type="datetimeFigureOut">
               <a:rPr lang="sk-SK" smtClean="0"/>
-              <a:t>20. 10. 2025</a:t>
+              <a:t>25. 10. 2026</a:t>
             </a:fld>
             <a:endParaRPr lang="sk-SK"/>
           </a:p>
@@ -1614,7 +1614,7 @@
           <a:p>
             <a:fld id="{10052495-8BC8-4CFB-94B1-B0429F101A0D}" type="datetimeFigureOut">
               <a:rPr lang="sk-SK" smtClean="0"/>
-              <a:t>20. 10. 2025</a:t>
+              <a:t>25. 10. 2026</a:t>
             </a:fld>
             <a:endParaRPr lang="sk-SK"/>
           </a:p>
@@ -1732,7 +1732,7 @@
           <a:p>
             <a:fld id="{10052495-8BC8-4CFB-94B1-B0429F101A0D}" type="datetimeFigureOut">
               <a:rPr lang="sk-SK" smtClean="0"/>
-              <a:t>20. 10. 2025</a:t>
+              <a:t>25. 10. 2026</a:t>
             </a:fld>
             <a:endParaRPr lang="sk-SK"/>
           </a:p>
@@ -1827,7 +1827,7 @@
           <a:p>
             <a:fld id="{10052495-8BC8-4CFB-94B1-B0429F101A0D}" type="datetimeFigureOut">
               <a:rPr lang="sk-SK" smtClean="0"/>
-              <a:t>20. 10. 2025</a:t>
+              <a:t>25. 10. 2026</a:t>
             </a:fld>
             <a:endParaRPr lang="sk-SK"/>
           </a:p>
@@ -2104,7 +2104,7 @@
           <a:p>
             <a:fld id="{10052495-8BC8-4CFB-94B1-B0429F101A0D}" type="datetimeFigureOut">
               <a:rPr lang="sk-SK" smtClean="0"/>
-              <a:t>20. 10. 2025</a:t>
+              <a:t>25. 10. 2026</a:t>
             </a:fld>
             <a:endParaRPr lang="sk-SK"/>
           </a:p>
@@ -2361,7 +2361,7 @@
           <a:p>
             <a:fld id="{10052495-8BC8-4CFB-94B1-B0429F101A0D}" type="datetimeFigureOut">
               <a:rPr lang="sk-SK" smtClean="0"/>
-              <a:t>20. 10. 2025</a:t>
+              <a:t>25. 10. 2026</a:t>
             </a:fld>
             <a:endParaRPr lang="sk-SK"/>
           </a:p>
@@ -2574,7 +2574,7 @@
           <a:p>
             <a:fld id="{10052495-8BC8-4CFB-94B1-B0429F101A0D}" type="datetimeFigureOut">
               <a:rPr lang="sk-SK" smtClean="0"/>
-              <a:t>20. 10. 2025</a:t>
+              <a:t>25. 10. 2026</a:t>
             </a:fld>
             <a:endParaRPr lang="sk-SK"/>
           </a:p>
@@ -4214,6 +4214,9 @@
             </a:r>
             <a:r>
               <a:rPr lang="sk-SK" dirty="0" err="1">
+                <a:solidFill>
+                  <a:srgbClr val="FF0000"/>
+                </a:solidFill>
                 <a:highlight>
                   <a:srgbClr val="FFFF00"/>
                 </a:highlight>
@@ -4222,6 +4225,9 @@
               <a:t>java.lang.String</a:t>
             </a:r>
             <a:endParaRPr lang="sk-SK" dirty="0">
+              <a:solidFill>
+                <a:srgbClr val="FF0000"/>
+              </a:solidFill>
               <a:highlight>
                 <a:srgbClr val="FFFF00"/>
               </a:highlight>
@@ -4235,7 +4241,14 @@
               </a:spcBef>
             </a:pPr>
             <a:r>
-              <a:rPr lang="sk-SK" sz="2800" dirty="0"/>
+              <a:rPr lang="sk-SK" sz="2800" dirty="0">
+                <a:solidFill>
+                  <a:srgbClr val="FF0000"/>
+                </a:solidFill>
+                <a:highlight>
+                  <a:srgbClr val="00FFFF"/>
+                </a:highlight>
+              </a:rPr>
               <a:t>Nie je primitívny typ</a:t>
             </a:r>
           </a:p>
@@ -4246,7 +4259,14 @@
               </a:spcBef>
             </a:pPr>
             <a:r>
-              <a:rPr lang="sk-SK" sz="2800" dirty="0"/>
+              <a:rPr lang="sk-SK" sz="2800" dirty="0">
+                <a:solidFill>
+                  <a:srgbClr val="FF0000"/>
+                </a:solidFill>
+                <a:highlight>
+                  <a:srgbClr val="00FFFF"/>
+                </a:highlight>
+              </a:rPr>
               <a:t>Je nemenný, po vytvorení sa objekt nedá meniť</a:t>
             </a:r>
           </a:p>
@@ -4257,7 +4277,14 @@
               </a:spcBef>
             </a:pPr>
             <a:r>
-              <a:rPr lang="sk-SK" sz="2800" dirty="0"/>
+              <a:rPr lang="sk-SK" sz="2800" dirty="0">
+                <a:solidFill>
+                  <a:srgbClr val="FF0000"/>
+                </a:solidFill>
+                <a:highlight>
+                  <a:srgbClr val="00FFFF"/>
+                </a:highlight>
+              </a:rPr>
               <a:t>Reťazec má dĺžku a index, viem pristupovať k jeho znakom</a:t>
             </a:r>
           </a:p>
@@ -4269,11 +4296,29 @@
               <a:buNone/>
             </a:pPr>
             <a:r>
-              <a:rPr lang="sk-SK" dirty="0"/>
-              <a:t>Vytvorenie reťazca 	</a:t>
+              <a:rPr lang="sk-SK" dirty="0">
+                <a:solidFill>
+                  <a:srgbClr val="FF0000"/>
+                </a:solidFill>
+                <a:highlight>
+                  <a:srgbClr val="00FFFF"/>
+                </a:highlight>
+              </a:rPr>
+              <a:t>Vytvorenie reťazca </a:t>
+            </a:r>
+            <a:r>
+              <a:rPr lang="sk-SK" dirty="0">
+                <a:solidFill>
+                  <a:srgbClr val="FF0000"/>
+                </a:solidFill>
+              </a:rPr>
+              <a:t>	</a:t>
             </a:r>
             <a:r>
               <a:rPr lang="sk-SK" dirty="0" err="1">
+                <a:solidFill>
+                  <a:srgbClr val="FF0000"/>
+                </a:solidFill>
                 <a:highlight>
                   <a:srgbClr val="FFFF00"/>
                 </a:highlight>
@@ -4283,6 +4328,9 @@
             </a:r>
             <a:r>
               <a:rPr lang="sk-SK" dirty="0">
+                <a:solidFill>
+                  <a:srgbClr val="FF0000"/>
+                </a:solidFill>
                 <a:highlight>
                   <a:srgbClr val="FFFF00"/>
                 </a:highlight>
@@ -4292,6 +4340,9 @@
             </a:r>
             <a:r>
               <a:rPr lang="sk-SK" dirty="0" err="1">
+                <a:solidFill>
+                  <a:srgbClr val="FF0000"/>
+                </a:solidFill>
                 <a:highlight>
                   <a:srgbClr val="FFFF00"/>
                 </a:highlight>
@@ -4301,6 +4352,9 @@
             </a:r>
             <a:r>
               <a:rPr lang="sk-SK" dirty="0">
+                <a:solidFill>
+                  <a:srgbClr val="FF0000"/>
+                </a:solidFill>
                 <a:highlight>
                   <a:srgbClr val="FFFF00"/>
                 </a:highlight>
@@ -4310,6 +4364,9 @@
             </a:r>
             <a:r>
               <a:rPr lang="sk-SK" dirty="0" err="1">
+                <a:solidFill>
+                  <a:srgbClr val="FF0000"/>
+                </a:solidFill>
                 <a:highlight>
                   <a:srgbClr val="FFFF00"/>
                 </a:highlight>
@@ -4319,6 +4376,9 @@
             </a:r>
             <a:r>
               <a:rPr lang="sk-SK" dirty="0">
+                <a:solidFill>
+                  <a:srgbClr val="FF0000"/>
+                </a:solidFill>
                 <a:highlight>
                   <a:srgbClr val="FFFF00"/>
                 </a:highlight>
@@ -4328,6 +4388,9 @@
             </a:r>
             <a:r>
               <a:rPr lang="en-US" dirty="0">
+                <a:solidFill>
+                  <a:srgbClr val="FF0000"/>
+                </a:solidFill>
                 <a:highlight>
                   <a:srgbClr val="FFFF00"/>
                 </a:highlight>
@@ -4336,6 +4399,9 @@
               <a:t>;</a:t>
             </a:r>
             <a:endParaRPr lang="sk-SK" dirty="0">
+              <a:solidFill>
+                <a:srgbClr val="FF0000"/>
+              </a:solidFill>
               <a:highlight>
                 <a:srgbClr val="FFFF00"/>
               </a:highlight>
@@ -4350,19 +4416,51 @@
               <a:buNone/>
             </a:pPr>
             <a:r>
-              <a:rPr lang="en-US" dirty="0"/>
+              <a:rPr lang="en-US" dirty="0">
+                <a:solidFill>
+                  <a:srgbClr val="FF0000"/>
+                </a:solidFill>
+                <a:highlight>
+                  <a:srgbClr val="00FFFF"/>
+                </a:highlight>
+              </a:rPr>
               <a:t>D</a:t>
             </a:r>
             <a:r>
-              <a:rPr lang="sk-SK" dirty="0" err="1"/>
+              <a:rPr lang="sk-SK" dirty="0" err="1">
+                <a:solidFill>
+                  <a:srgbClr val="FF0000"/>
+                </a:solidFill>
+                <a:highlight>
+                  <a:srgbClr val="00FFFF"/>
+                </a:highlight>
+              </a:rPr>
               <a:t>ĺžka</a:t>
             </a:r>
             <a:r>
-              <a:rPr lang="sk-SK" dirty="0"/>
-              <a:t> reťazca 		</a:t>
+              <a:rPr lang="sk-SK" dirty="0">
+                <a:solidFill>
+                  <a:srgbClr val="FF0000"/>
+                </a:solidFill>
+                <a:highlight>
+                  <a:srgbClr val="00FFFF"/>
+                </a:highlight>
+              </a:rPr>
+              <a:t> reťazca </a:t>
+            </a:r>
+            <a:r>
+              <a:rPr lang="sk-SK" dirty="0">
+                <a:solidFill>
+                  <a:srgbClr val="FF0000"/>
+                </a:solidFill>
+              </a:rPr>
+              <a:t>		</a:t>
             </a:r>
             <a:r>
               <a:rPr lang="sk-SK" dirty="0" err="1">
+                <a:solidFill>
+                  <a:srgbClr val="FF0000"/>
+                </a:solidFill>
                 <a:highlight>
                   <a:srgbClr val="FFFF00"/>
                 </a:highlight>
@@ -4372,6 +4470,9 @@
             </a:r>
             <a:r>
               <a:rPr lang="sk-SK" dirty="0">
+                <a:solidFill>
+                  <a:srgbClr val="FF0000"/>
+                </a:solidFill>
                 <a:highlight>
                   <a:srgbClr val="FFFF00"/>
                 </a:highlight>
@@ -4381,6 +4482,9 @@
             </a:r>
             <a:r>
               <a:rPr lang="sk-SK" dirty="0" err="1">
+                <a:solidFill>
+                  <a:srgbClr val="FF0000"/>
+                </a:solidFill>
                 <a:highlight>
                   <a:srgbClr val="FFFF00"/>
                 </a:highlight>
@@ -4390,6 +4494,9 @@
             </a:r>
             <a:r>
               <a:rPr lang="sk-SK" b="1" dirty="0" err="1">
+                <a:solidFill>
+                  <a:srgbClr val="FF0000"/>
+                </a:solidFill>
                 <a:highlight>
                   <a:srgbClr val="FFFF00"/>
                 </a:highlight>
@@ -4399,6 +4506,9 @@
             </a:r>
             <a:r>
               <a:rPr lang="sk-SK" dirty="0">
+                <a:solidFill>
+                  <a:srgbClr val="FF0000"/>
+                </a:solidFill>
                 <a:highlight>
                   <a:srgbClr val="FFFF00"/>
                 </a:highlight>
@@ -4415,19 +4525,51 @@
               <a:buNone/>
             </a:pPr>
             <a:r>
-              <a:rPr lang="sk-SK" dirty="0"/>
+              <a:rPr lang="sk-SK" dirty="0">
+                <a:solidFill>
+                  <a:srgbClr val="FF0000"/>
+                </a:solidFill>
+                <a:highlight>
+                  <a:srgbClr val="00FFFF"/>
+                </a:highlight>
+              </a:rPr>
               <a:t>Znak na </a:t>
             </a:r>
             <a:r>
-              <a:rPr lang="sk-SK" dirty="0" err="1"/>
+              <a:rPr lang="sk-SK" dirty="0" err="1">
+                <a:solidFill>
+                  <a:srgbClr val="FF0000"/>
+                </a:solidFill>
+                <a:highlight>
+                  <a:srgbClr val="00FFFF"/>
+                </a:highlight>
+              </a:rPr>
               <a:t>pocícii</a:t>
             </a:r>
             <a:r>
-              <a:rPr lang="sk-SK" dirty="0"/>
-              <a:t> 		</a:t>
+              <a:rPr lang="sk-SK" dirty="0">
+                <a:solidFill>
+                  <a:srgbClr val="FF0000"/>
+                </a:solidFill>
+                <a:highlight>
+                  <a:srgbClr val="00FFFF"/>
+                </a:highlight>
+              </a:rPr>
+              <a:t> </a:t>
+            </a:r>
+            <a:r>
+              <a:rPr lang="sk-SK" dirty="0">
+                <a:solidFill>
+                  <a:srgbClr val="FF0000"/>
+                </a:solidFill>
+              </a:rPr>
+              <a:t>		</a:t>
             </a:r>
             <a:r>
               <a:rPr lang="sk-SK" dirty="0" err="1">
+                <a:solidFill>
+                  <a:srgbClr val="FF0000"/>
+                </a:solidFill>
                 <a:highlight>
                   <a:srgbClr val="FFFF00"/>
                 </a:highlight>
@@ -4437,6 +4579,9 @@
             </a:r>
             <a:r>
               <a:rPr lang="sk-SK" dirty="0">
+                <a:solidFill>
+                  <a:srgbClr val="FF0000"/>
+                </a:solidFill>
                 <a:highlight>
                   <a:srgbClr val="FFFF00"/>
                 </a:highlight>
@@ -4446,6 +4591,9 @@
             </a:r>
             <a:r>
               <a:rPr lang="sk-SK" dirty="0" err="1">
+                <a:solidFill>
+                  <a:srgbClr val="FF0000"/>
+                </a:solidFill>
                 <a:highlight>
                   <a:srgbClr val="FFFF00"/>
                 </a:highlight>
@@ -4455,6 +4603,9 @@
             </a:r>
             <a:r>
               <a:rPr lang="sk-SK" b="1" dirty="0" err="1">
+                <a:solidFill>
+                  <a:srgbClr val="FF0000"/>
+                </a:solidFill>
                 <a:highlight>
                   <a:srgbClr val="FFFF00"/>
                 </a:highlight>
@@ -4464,6 +4615,9 @@
             </a:r>
             <a:r>
               <a:rPr lang="sk-SK" dirty="0">
+                <a:solidFill>
+                  <a:srgbClr val="FF0000"/>
+                </a:solidFill>
                 <a:highlight>
                   <a:srgbClr val="FFFF00"/>
                 </a:highlight>
@@ -4480,11 +4634,29 @@
               <a:buNone/>
             </a:pPr>
             <a:r>
-              <a:rPr lang="sk-SK" dirty="0"/>
-              <a:t>Spájanie reťazcov 	</a:t>
+              <a:rPr lang="sk-SK" dirty="0">
+                <a:solidFill>
+                  <a:srgbClr val="FF0000"/>
+                </a:solidFill>
+                <a:highlight>
+                  <a:srgbClr val="00FFFF"/>
+                </a:highlight>
+              </a:rPr>
+              <a:t>Spájanie reťazcov </a:t>
+            </a:r>
+            <a:r>
+              <a:rPr lang="sk-SK" dirty="0">
+                <a:solidFill>
+                  <a:srgbClr val="FF0000"/>
+                </a:solidFill>
+              </a:rPr>
+              <a:t>	</a:t>
             </a:r>
             <a:r>
               <a:rPr lang="sk-SK" dirty="0" err="1">
+                <a:solidFill>
+                  <a:srgbClr val="FF0000"/>
+                </a:solidFill>
                 <a:highlight>
                   <a:srgbClr val="FFFF00"/>
                 </a:highlight>
@@ -4494,6 +4666,9 @@
             </a:r>
             <a:r>
               <a:rPr lang="sk-SK" dirty="0">
+                <a:solidFill>
+                  <a:srgbClr val="FF0000"/>
+                </a:solidFill>
                 <a:highlight>
                   <a:srgbClr val="FFFF00"/>
                 </a:highlight>
@@ -4503,6 +4678,9 @@
             </a:r>
             <a:r>
               <a:rPr lang="sk-SK" dirty="0" err="1">
+                <a:solidFill>
+                  <a:srgbClr val="FF0000"/>
+                </a:solidFill>
                 <a:highlight>
                   <a:srgbClr val="FFFF00"/>
                 </a:highlight>
@@ -4512,6 +4690,9 @@
             </a:r>
             <a:r>
               <a:rPr lang="sk-SK" dirty="0">
+                <a:solidFill>
+                  <a:srgbClr val="FF0000"/>
+                </a:solidFill>
                 <a:highlight>
                   <a:srgbClr val="FFFF00"/>
                 </a:highlight>
@@ -4521,6 +4702,9 @@
             </a:r>
             <a:r>
               <a:rPr lang="sk-SK" dirty="0" err="1">
+                <a:solidFill>
+                  <a:srgbClr val="FF0000"/>
+                </a:solidFill>
                 <a:highlight>
                   <a:srgbClr val="FFFF00"/>
                 </a:highlight>
@@ -4530,6 +4714,9 @@
             </a:r>
             <a:r>
               <a:rPr lang="sk-SK" dirty="0">
+                <a:solidFill>
+                  <a:srgbClr val="FF0000"/>
+                </a:solidFill>
                 <a:highlight>
                   <a:srgbClr val="FFFF00"/>
                 </a:highlight>
@@ -4546,11 +4733,29 @@
               <a:buNone/>
             </a:pPr>
             <a:r>
-              <a:rPr lang="sk-SK" dirty="0"/>
-              <a:t>Opakovanie reťazca 	</a:t>
+              <a:rPr lang="sk-SK" dirty="0">
+                <a:solidFill>
+                  <a:srgbClr val="FF0000"/>
+                </a:solidFill>
+                <a:highlight>
+                  <a:srgbClr val="00FFFF"/>
+                </a:highlight>
+              </a:rPr>
+              <a:t>Opakovanie reťazca </a:t>
+            </a:r>
+            <a:r>
+              <a:rPr lang="sk-SK" dirty="0">
+                <a:solidFill>
+                  <a:srgbClr val="FF0000"/>
+                </a:solidFill>
+              </a:rPr>
+              <a:t>	</a:t>
             </a:r>
             <a:r>
               <a:rPr lang="en-US" dirty="0">
+                <a:solidFill>
+                  <a:srgbClr val="FF0000"/>
+                </a:solidFill>
                 <a:highlight>
                   <a:srgbClr val="FFFF00"/>
                 </a:highlight>
@@ -4560,6 +4765,9 @@
             </a:r>
             <a:r>
               <a:rPr lang="en-US" dirty="0" err="1">
+                <a:solidFill>
+                  <a:srgbClr val="FF0000"/>
+                </a:solidFill>
                 <a:highlight>
                   <a:srgbClr val="FFFF00"/>
                 </a:highlight>
@@ -4569,6 +4777,9 @@
             </a:r>
             <a:r>
               <a:rPr lang="en-US" b="1" dirty="0" err="1">
+                <a:solidFill>
+                  <a:srgbClr val="FF0000"/>
+                </a:solidFill>
                 <a:highlight>
                   <a:srgbClr val="FFFF00"/>
                 </a:highlight>
@@ -4578,6 +4789,9 @@
             </a:r>
             <a:r>
               <a:rPr lang="en-US" dirty="0">
+                <a:solidFill>
+                  <a:srgbClr val="FF0000"/>
+                </a:solidFill>
                 <a:highlight>
                   <a:srgbClr val="FFFF00"/>
                 </a:highlight>
@@ -4586,6 +4800,9 @@
               <a:t>(5);</a:t>
             </a:r>
             <a:endParaRPr lang="sk-SK" dirty="0">
+              <a:solidFill>
+                <a:srgbClr val="FF0000"/>
+              </a:solidFill>
               <a:highlight>
                 <a:srgbClr val="FFFF00"/>
               </a:highlight>
@@ -4616,7 +4833,14 @@
           <a:lstStyle/>
           <a:p>
             <a:r>
-              <a:rPr lang="sk-SK" dirty="0"/>
+              <a:rPr lang="sk-SK" dirty="0">
+                <a:solidFill>
+                  <a:srgbClr val="FF0000"/>
+                </a:solidFill>
+                <a:highlight>
+                  <a:srgbClr val="00FFFF"/>
+                </a:highlight>
+              </a:rPr>
               <a:t>Reťazec</a:t>
             </a:r>
           </a:p>
@@ -4701,11 +4925,29 @@
               <a:buNone/>
             </a:pPr>
             <a:r>
-              <a:rPr lang="sk-SK" dirty="0"/>
-              <a:t>Porovnanie hodnôt	</a:t>
+              <a:rPr lang="sk-SK" dirty="0">
+                <a:solidFill>
+                  <a:srgbClr val="FF0000"/>
+                </a:solidFill>
+                <a:highlight>
+                  <a:srgbClr val="00FFFF"/>
+                </a:highlight>
+              </a:rPr>
+              <a:t>Porovnanie hodnôt</a:t>
+            </a:r>
+            <a:r>
+              <a:rPr lang="sk-SK" dirty="0">
+                <a:solidFill>
+                  <a:srgbClr val="FF0000"/>
+                </a:solidFill>
+              </a:rPr>
+              <a:t>	</a:t>
             </a:r>
             <a:r>
               <a:rPr lang="sk-SK" dirty="0" err="1">
+                <a:solidFill>
+                  <a:srgbClr val="FF0000"/>
+                </a:solidFill>
                 <a:highlight>
                   <a:srgbClr val="FFFF00"/>
                 </a:highlight>
@@ -4715,6 +4957,9 @@
             </a:r>
             <a:r>
               <a:rPr lang="sk-SK" b="1" dirty="0" err="1">
+                <a:solidFill>
+                  <a:srgbClr val="FF0000"/>
+                </a:solidFill>
                 <a:highlight>
                   <a:srgbClr val="FFFF00"/>
                 </a:highlight>
@@ -4724,6 +4969,9 @@
             </a:r>
             <a:r>
               <a:rPr lang="sk-SK" dirty="0">
+                <a:solidFill>
+                  <a:srgbClr val="FF0000"/>
+                </a:solidFill>
                 <a:highlight>
                   <a:srgbClr val="FFFF00"/>
                 </a:highlight>
@@ -4733,6 +4981,9 @@
             </a:r>
             <a:r>
               <a:rPr lang="en-US" dirty="0">
+                <a:solidFill>
+                  <a:srgbClr val="FF0000"/>
+                </a:solidFill>
                 <a:highlight>
                   <a:srgbClr val="FFFF00"/>
                 </a:highlight>
@@ -4741,6 +4992,9 @@
               <a:t>;</a:t>
             </a:r>
             <a:endParaRPr lang="sk-SK" dirty="0">
+              <a:solidFill>
+                <a:srgbClr val="FF0000"/>
+              </a:solidFill>
               <a:highlight>
                 <a:srgbClr val="FFFF00"/>
               </a:highlight>
@@ -4755,7 +5009,14 @@
               <a:buNone/>
             </a:pPr>
             <a:r>
-              <a:rPr lang="sk-SK" dirty="0"/>
+              <a:rPr lang="sk-SK" dirty="0">
+                <a:solidFill>
+                  <a:srgbClr val="FF0000"/>
+                </a:solidFill>
+                <a:highlight>
+                  <a:srgbClr val="00FFFF"/>
+                </a:highlight>
+              </a:rPr>
               <a:t>Porovnanie lexikograficky: </a:t>
             </a:r>
           </a:p>
@@ -4768,6 +5029,9 @@
             </a:pPr>
             <a:r>
               <a:rPr lang="sk-SK" dirty="0">
+                <a:solidFill>
+                  <a:srgbClr val="FF0000"/>
+                </a:solidFill>
                 <a:highlight>
                   <a:srgbClr val="FFFF00"/>
                 </a:highlight>
@@ -4777,6 +5041,9 @@
             </a:r>
             <a:r>
               <a:rPr lang="sk-SK" dirty="0" err="1">
+                <a:solidFill>
+                  <a:srgbClr val="FF0000"/>
+                </a:solidFill>
                 <a:highlight>
                   <a:srgbClr val="FFFF00"/>
                 </a:highlight>
@@ -4786,6 +5053,9 @@
             </a:r>
             <a:r>
               <a:rPr lang="sk-SK" dirty="0">
+                <a:solidFill>
+                  <a:srgbClr val="FF0000"/>
+                </a:solidFill>
                 <a:highlight>
                   <a:srgbClr val="FFFF00"/>
                 </a:highlight>
@@ -4795,6 +5065,9 @@
             </a:r>
             <a:r>
               <a:rPr lang="sk-SK" b="1" dirty="0" err="1">
+                <a:solidFill>
+                  <a:srgbClr val="FF0000"/>
+                </a:solidFill>
                 <a:highlight>
                   <a:srgbClr val="FFFF00"/>
                 </a:highlight>
@@ -4804,6 +5077,9 @@
             </a:r>
             <a:r>
               <a:rPr lang="sk-SK" dirty="0">
+                <a:solidFill>
+                  <a:srgbClr val="FF0000"/>
+                </a:solidFill>
                 <a:highlight>
                   <a:srgbClr val="FFFF00"/>
                 </a:highlight>
@@ -4813,6 +5089,9 @@
             </a:r>
             <a:r>
               <a:rPr lang="sk-SK" dirty="0" err="1">
+                <a:solidFill>
+                  <a:srgbClr val="FF0000"/>
+                </a:solidFill>
                 <a:highlight>
                   <a:srgbClr val="FFFF00"/>
                 </a:highlight>
@@ -4822,6 +5101,9 @@
             </a:r>
             <a:r>
               <a:rPr lang="sk-SK" dirty="0">
+                <a:solidFill>
+                  <a:srgbClr val="FF0000"/>
+                </a:solidFill>
                 <a:highlight>
                   <a:srgbClr val="FFFF00"/>
                 </a:highlight>
@@ -4839,6 +5121,9 @@
             </a:pPr>
             <a:r>
               <a:rPr lang="sk-SK" dirty="0">
+                <a:solidFill>
+                  <a:srgbClr val="FF0000"/>
+                </a:solidFill>
                 <a:highlight>
                   <a:srgbClr val="FFFF00"/>
                 </a:highlight>
@@ -4848,6 +5133,9 @@
             </a:r>
             <a:r>
               <a:rPr lang="sk-SK" dirty="0" err="1">
+                <a:solidFill>
+                  <a:srgbClr val="FF0000"/>
+                </a:solidFill>
                 <a:highlight>
                   <a:srgbClr val="FFFF00"/>
                 </a:highlight>
@@ -4857,6 +5145,9 @@
             </a:r>
             <a:r>
               <a:rPr lang="sk-SK" dirty="0">
+                <a:solidFill>
+                  <a:srgbClr val="FF0000"/>
+                </a:solidFill>
                 <a:highlight>
                   <a:srgbClr val="FFFF00"/>
                 </a:highlight>
@@ -4866,6 +5157,9 @@
             </a:r>
             <a:r>
               <a:rPr lang="sk-SK" b="1" dirty="0" err="1">
+                <a:solidFill>
+                  <a:srgbClr val="FF0000"/>
+                </a:solidFill>
                 <a:highlight>
                   <a:srgbClr val="FFFF00"/>
                 </a:highlight>
@@ -4875,6 +5169,9 @@
             </a:r>
             <a:r>
               <a:rPr lang="sk-SK" dirty="0">
+                <a:solidFill>
+                  <a:srgbClr val="FF0000"/>
+                </a:solidFill>
                 <a:highlight>
                   <a:srgbClr val="FFFF00"/>
                 </a:highlight>
@@ -4884,6 +5181,9 @@
             </a:r>
             <a:r>
               <a:rPr lang="sk-SK" dirty="0" err="1">
+                <a:solidFill>
+                  <a:srgbClr val="FF0000"/>
+                </a:solidFill>
                 <a:highlight>
                   <a:srgbClr val="FFFF00"/>
                 </a:highlight>
@@ -4893,6 +5193,9 @@
             </a:r>
             <a:r>
               <a:rPr lang="sk-SK" dirty="0">
+                <a:solidFill>
+                  <a:srgbClr val="FF0000"/>
+                </a:solidFill>
                 <a:highlight>
                   <a:srgbClr val="FFFF00"/>
                 </a:highlight>
@@ -4909,11 +5212,29 @@
               <a:buNone/>
             </a:pPr>
             <a:r>
-              <a:rPr lang="sk-SK" dirty="0"/>
-              <a:t>Má reťazec iba biele znaky?	</a:t>
+              <a:rPr lang="sk-SK" dirty="0">
+                <a:solidFill>
+                  <a:srgbClr val="FF0000"/>
+                </a:solidFill>
+                <a:highlight>
+                  <a:srgbClr val="00FFFF"/>
+                </a:highlight>
+              </a:rPr>
+              <a:t>Má reťazec iba biele znaky?</a:t>
+            </a:r>
+            <a:r>
+              <a:rPr lang="sk-SK" dirty="0">
+                <a:solidFill>
+                  <a:srgbClr val="FF0000"/>
+                </a:solidFill>
+              </a:rPr>
+              <a:t>	</a:t>
             </a:r>
             <a:r>
               <a:rPr lang="sk-SK" dirty="0" err="1">
+                <a:solidFill>
+                  <a:srgbClr val="FF0000"/>
+                </a:solidFill>
                 <a:highlight>
                   <a:srgbClr val="FFFF00"/>
                 </a:highlight>
@@ -4923,6 +5244,9 @@
             </a:r>
             <a:r>
               <a:rPr lang="sk-SK" b="1" dirty="0" err="1">
+                <a:solidFill>
+                  <a:srgbClr val="FF0000"/>
+                </a:solidFill>
                 <a:highlight>
                   <a:srgbClr val="FFFF00"/>
                 </a:highlight>
@@ -4932,6 +5256,9 @@
             </a:r>
             <a:r>
               <a:rPr lang="sk-SK" dirty="0">
+                <a:solidFill>
+                  <a:srgbClr val="FF0000"/>
+                </a:solidFill>
                 <a:highlight>
                   <a:srgbClr val="FFFF00"/>
                 </a:highlight>
@@ -4947,7 +5274,11 @@
               </a:spcBef>
               <a:buNone/>
             </a:pPr>
-            <a:endParaRPr lang="sk-SK" dirty="0"/>
+            <a:endParaRPr lang="sk-SK" dirty="0">
+              <a:solidFill>
+                <a:srgbClr val="FF0000"/>
+              </a:solidFill>
+            </a:endParaRPr>
           </a:p>
           <a:p>
             <a:pPr marL="0" indent="0">
@@ -4957,7 +5288,14 @@
               <a:buNone/>
             </a:pPr>
             <a:r>
-              <a:rPr lang="sk-SK" dirty="0"/>
+              <a:rPr lang="sk-SK" dirty="0">
+                <a:solidFill>
+                  <a:srgbClr val="FF0000"/>
+                </a:solidFill>
+                <a:highlight>
+                  <a:srgbClr val="00FFFF"/>
+                </a:highlight>
+              </a:rPr>
               <a:t>Vytvorenie podreťazca	</a:t>
             </a:r>
           </a:p>
@@ -4970,6 +5308,9 @@
             </a:pPr>
             <a:r>
               <a:rPr lang="en-US" dirty="0">
+                <a:solidFill>
+                  <a:srgbClr val="FF0000"/>
+                </a:solidFill>
                 <a:highlight>
                   <a:srgbClr val="FFFF00"/>
                 </a:highlight>
@@ -4987,6 +5328,9 @@
             </a:pPr>
             <a:r>
               <a:rPr lang="en-US" dirty="0">
+                <a:solidFill>
+                  <a:srgbClr val="FF0000"/>
+                </a:solidFill>
                 <a:highlight>
                   <a:srgbClr val="FFFF00"/>
                 </a:highlight>
@@ -4996,6 +5340,9 @@
             </a:r>
             <a:r>
               <a:rPr lang="en-US" dirty="0" err="1">
+                <a:solidFill>
+                  <a:srgbClr val="FF0000"/>
+                </a:solidFill>
                 <a:highlight>
                   <a:srgbClr val="FFFF00"/>
                 </a:highlight>
@@ -5005,6 +5352,9 @@
             </a:r>
             <a:r>
               <a:rPr lang="en-US" b="1" dirty="0" err="1">
+                <a:solidFill>
+                  <a:srgbClr val="FF0000"/>
+                </a:solidFill>
                 <a:highlight>
                   <a:srgbClr val="FFFF00"/>
                 </a:highlight>
@@ -5014,6 +5364,9 @@
             </a:r>
             <a:r>
               <a:rPr lang="en-US" dirty="0">
+                <a:solidFill>
+                  <a:srgbClr val="FF0000"/>
+                </a:solidFill>
                 <a:highlight>
                   <a:srgbClr val="FFFF00"/>
                 </a:highlight>
@@ -5022,6 +5375,9 @@
               <a:t>(6, 11); // "world"</a:t>
             </a:r>
             <a:endParaRPr lang="sk-SK" dirty="0">
+              <a:solidFill>
+                <a:srgbClr val="FF0000"/>
+              </a:solidFill>
               <a:highlight>
                 <a:srgbClr val="FFFF00"/>
               </a:highlight>
@@ -5137,7 +5493,14 @@
               <a:buNone/>
             </a:pPr>
             <a:r>
-              <a:rPr lang="sk-SK" dirty="0"/>
+              <a:rPr lang="sk-SK" dirty="0">
+                <a:solidFill>
+                  <a:srgbClr val="FF0000"/>
+                </a:solidFill>
+                <a:highlight>
+                  <a:srgbClr val="00FFFF"/>
+                </a:highlight>
+              </a:rPr>
               <a:t>Vyhľadávanie</a:t>
             </a:r>
           </a:p>
@@ -5203,6 +5566,9 @@
             </a:r>
             <a:r>
               <a:rPr lang="sk-SK" b="1" dirty="0" err="1">
+                <a:solidFill>
+                  <a:srgbClr val="FF0000"/>
+                </a:solidFill>
                 <a:highlight>
                   <a:srgbClr val="FFFF00"/>
                 </a:highlight>
@@ -5271,6 +5637,9 @@
             </a:r>
             <a:r>
               <a:rPr lang="sk-SK" b="1" dirty="0" err="1">
+                <a:solidFill>
+                  <a:srgbClr val="FF0000"/>
+                </a:solidFill>
                 <a:highlight>
                   <a:srgbClr val="FFFF00"/>
                 </a:highlight>
@@ -5306,6 +5675,9 @@
             </a:r>
             <a:r>
               <a:rPr lang="sk-SK" b="1" dirty="0" err="1">
+                <a:solidFill>
+                  <a:srgbClr val="FF0000"/>
+                </a:solidFill>
                 <a:highlight>
                   <a:srgbClr val="FFFF00"/>
                 </a:highlight>
@@ -5331,7 +5703,14 @@
               <a:buNone/>
             </a:pPr>
             <a:r>
-              <a:rPr lang="sk-SK" dirty="0"/>
+              <a:rPr lang="sk-SK" dirty="0">
+                <a:solidFill>
+                  <a:srgbClr val="FF0000"/>
+                </a:solidFill>
+                <a:highlight>
+                  <a:srgbClr val="00FFFF"/>
+                </a:highlight>
+              </a:rPr>
               <a:t>Úprava</a:t>
             </a:r>
           </a:p>
@@ -5362,6 +5741,9 @@
             </a:r>
             <a:r>
               <a:rPr lang="sk-SK" b="1" dirty="0">
+                <a:solidFill>
+                  <a:srgbClr val="FF0000"/>
+                </a:solidFill>
                 <a:highlight>
                   <a:srgbClr val="FFFF00"/>
                 </a:highlight>
@@ -5415,6 +5797,9 @@
             </a:r>
             <a:r>
               <a:rPr lang="sk-SK" b="1" dirty="0" err="1">
+                <a:solidFill>
+                  <a:srgbClr val="FF0000"/>
+                </a:solidFill>
                 <a:highlight>
                   <a:srgbClr val="FFFF00"/>
                 </a:highlight>
@@ -5456,7 +5841,14 @@
           <a:lstStyle/>
           <a:p>
             <a:r>
-              <a:rPr lang="sk-SK" dirty="0"/>
+              <a:rPr lang="sk-SK" dirty="0">
+                <a:solidFill>
+                  <a:srgbClr val="FF0000"/>
+                </a:solidFill>
+                <a:highlight>
+                  <a:srgbClr val="00FFFF"/>
+                </a:highlight>
+              </a:rPr>
               <a:t>Úprava a vyhľadávanie</a:t>
             </a:r>
           </a:p>
@@ -5883,11 +6275,21 @@
           <a:lstStyle/>
           <a:p>
             <a:r>
-              <a:rPr lang="sk-SK" dirty="0"/>
+              <a:rPr lang="sk-SK" dirty="0">
+                <a:solidFill>
+                  <a:srgbClr val="FF0000"/>
+                </a:solidFill>
+                <a:highlight>
+                  <a:srgbClr val="00FFFF"/>
+                </a:highlight>
+              </a:rPr>
               <a:t>Rozdeľovanie a spájanie – </a:t>
             </a:r>
             <a:r>
               <a:rPr lang="sk-SK" dirty="0" err="1">
+                <a:solidFill>
+                  <a:srgbClr val="FF0000"/>
+                </a:solidFill>
                 <a:highlight>
                   <a:srgbClr val="FFFF00"/>
                 </a:highlight>
@@ -5899,6 +6301,9 @@
             </a:r>
             <a:r>
               <a:rPr lang="sk-SK" dirty="0">
+                <a:solidFill>
+                  <a:srgbClr val="FF0000"/>
+                </a:solidFill>
                 <a:highlight>
                   <a:srgbClr val="FFFF00"/>
                 </a:highlight>
@@ -5909,11 +6314,21 @@
               <a:t>()</a:t>
             </a:r>
             <a:r>
-              <a:rPr lang="sk-SK" dirty="0"/>
+              <a:rPr lang="sk-SK" dirty="0">
+                <a:solidFill>
+                  <a:srgbClr val="FF0000"/>
+                </a:solidFill>
+                <a:highlight>
+                  <a:srgbClr val="00FFFF"/>
+                </a:highlight>
+              </a:rPr>
               <a:t> a </a:t>
             </a:r>
             <a:r>
               <a:rPr lang="sk-SK" dirty="0" err="1">
+                <a:solidFill>
+                  <a:srgbClr val="FF0000"/>
+                </a:solidFill>
                 <a:highlight>
                   <a:srgbClr val="FFFF00"/>
                 </a:highlight>
@@ -5925,6 +6340,9 @@
             </a:r>
             <a:r>
               <a:rPr lang="sk-SK" dirty="0">
+                <a:solidFill>
+                  <a:srgbClr val="FF0000"/>
+                </a:solidFill>
                 <a:highlight>
                   <a:srgbClr val="FFFF00"/>
                 </a:highlight>
@@ -6017,6 +6435,9 @@
             </a:pPr>
             <a:r>
               <a:rPr lang="sk-SK" dirty="0" err="1">
+                <a:solidFill>
+                  <a:srgbClr val="FF0000"/>
+                </a:solidFill>
                 <a:highlight>
                   <a:srgbClr val="FFFF00"/>
                 </a:highlight>
@@ -6026,6 +6447,9 @@
             </a:r>
             <a:r>
               <a:rPr lang="sk-SK" dirty="0">
+                <a:solidFill>
+                  <a:srgbClr val="FF0000"/>
+                </a:solidFill>
                 <a:highlight>
                   <a:srgbClr val="FFFF00"/>
                 </a:highlight>
@@ -6034,11 +6458,18 @@
               <a:t>()</a:t>
             </a:r>
             <a:r>
-              <a:rPr lang="sk-SK" dirty="0"/>
+              <a:rPr lang="sk-SK" dirty="0">
+                <a:solidFill>
+                  <a:srgbClr val="FF0000"/>
+                </a:solidFill>
+              </a:rPr>
               <a:t>, </a:t>
             </a:r>
             <a:r>
               <a:rPr lang="sk-SK" dirty="0" err="1">
+                <a:solidFill>
+                  <a:srgbClr val="FF0000"/>
+                </a:solidFill>
                 <a:highlight>
                   <a:srgbClr val="FFFF00"/>
                 </a:highlight>
@@ -6048,6 +6479,9 @@
             </a:r>
             <a:r>
               <a:rPr lang="sk-SK" dirty="0">
+                <a:solidFill>
+                  <a:srgbClr val="FF0000"/>
+                </a:solidFill>
                 <a:highlight>
                   <a:srgbClr val="FFFF00"/>
                 </a:highlight>
@@ -6056,11 +6490,18 @@
               <a:t>()</a:t>
             </a:r>
             <a:r>
-              <a:rPr lang="sk-SK" dirty="0"/>
+              <a:rPr lang="sk-SK" dirty="0">
+                <a:solidFill>
+                  <a:srgbClr val="FF0000"/>
+                </a:solidFill>
+              </a:rPr>
               <a:t>, </a:t>
             </a:r>
             <a:r>
               <a:rPr lang="sk-SK" dirty="0" err="1">
+                <a:solidFill>
+                  <a:srgbClr val="FF0000"/>
+                </a:solidFill>
                 <a:highlight>
                   <a:srgbClr val="FFFF00"/>
                 </a:highlight>
@@ -6070,6 +6511,9 @@
             </a:r>
             <a:r>
               <a:rPr lang="sk-SK" dirty="0">
+                <a:solidFill>
+                  <a:srgbClr val="FF0000"/>
+                </a:solidFill>
                 <a:highlight>
                   <a:srgbClr val="FFFF00"/>
                 </a:highlight>
@@ -6078,11 +6522,18 @@
               <a:t>()</a:t>
             </a:r>
             <a:r>
-              <a:rPr lang="sk-SK" dirty="0"/>
+              <a:rPr lang="sk-SK" dirty="0">
+                <a:solidFill>
+                  <a:srgbClr val="FF0000"/>
+                </a:solidFill>
+              </a:rPr>
               <a:t>, </a:t>
             </a:r>
             <a:r>
               <a:rPr lang="sk-SK" dirty="0" err="1">
+                <a:solidFill>
+                  <a:srgbClr val="FF0000"/>
+                </a:solidFill>
                 <a:highlight>
                   <a:srgbClr val="FFFF00"/>
                 </a:highlight>
@@ -6092,6 +6543,9 @@
             </a:r>
             <a:r>
               <a:rPr lang="sk-SK" dirty="0">
+                <a:solidFill>
+                  <a:srgbClr val="FF0000"/>
+                </a:solidFill>
                 <a:highlight>
                   <a:srgbClr val="FFFF00"/>
                 </a:highlight>
@@ -6100,11 +6554,18 @@
               <a:t>()</a:t>
             </a:r>
             <a:r>
-              <a:rPr lang="sk-SK" dirty="0"/>
+              <a:rPr lang="sk-SK" dirty="0">
+                <a:solidFill>
+                  <a:srgbClr val="FF0000"/>
+                </a:solidFill>
+              </a:rPr>
               <a:t>, </a:t>
             </a:r>
             <a:r>
               <a:rPr lang="sk-SK" dirty="0" err="1">
+                <a:solidFill>
+                  <a:srgbClr val="FF0000"/>
+                </a:solidFill>
                 <a:highlight>
                   <a:srgbClr val="FFFF00"/>
                 </a:highlight>
@@ -6114,6 +6575,9 @@
             </a:r>
             <a:r>
               <a:rPr lang="sk-SK" dirty="0">
+                <a:solidFill>
+                  <a:srgbClr val="FF0000"/>
+                </a:solidFill>
                 <a:highlight>
                   <a:srgbClr val="FFFF00"/>
                 </a:highlight>
@@ -6658,11 +7122,21 @@
           <a:lstStyle/>
           <a:p>
             <a:r>
-              <a:rPr lang="sk-SK" dirty="0"/>
+              <a:rPr lang="sk-SK" dirty="0">
+                <a:solidFill>
+                  <a:srgbClr val="FF0000"/>
+                </a:solidFill>
+                <a:highlight>
+                  <a:srgbClr val="00FFFF"/>
+                </a:highlight>
+              </a:rPr>
               <a:t>Efektívna tvorba reťazcov - </a:t>
             </a:r>
             <a:r>
               <a:rPr lang="sk-SK" dirty="0" err="1">
+                <a:solidFill>
+                  <a:srgbClr val="FF0000"/>
+                </a:solidFill>
                 <a:highlight>
                   <a:srgbClr val="FFFF00"/>
                 </a:highlight>
@@ -6673,6 +7147,9 @@
               <a:t>StringBuilder</a:t>
             </a:r>
             <a:endParaRPr lang="sk-SK" dirty="0">
+              <a:solidFill>
+                <a:srgbClr val="FF0000"/>
+              </a:solidFill>
               <a:highlight>
                 <a:srgbClr val="FFFF00"/>
               </a:highlight>
